--- a/preaching/敬畏神.pptx
+++ b/preaching/敬畏神.pptx
@@ -3963,7 +3963,7 @@
             </a:r>
             <a:r>
               <a:rPr lang="en-US" sz="3600" dirty="0"/>
-              <a:t>這樣看來，我親愛的弟兄，你們既是常順服的，不但我在你們那裡，就是我如今不在你們那裡，更是順服的，就當恐懼戰兢，做成你們得救的工夫。 (腓 2:12</a:t>
+              <a:t>這樣看來，我親愛的弟兄，你們既是常順服的，不但我在你們那裏，就是我如今不在你們那裏，更是順服的，就當恐懼戰兢作成你們得救的工夫。 (腓 2:12</a:t>
             </a:r>
             <a:r>
               <a:rPr lang="en-US" sz="3600" dirty="0" smtClean="0"/>
@@ -4582,7 +4582,7 @@
             </a:r>
             <a:r>
               <a:rPr lang="en-US" sz="3600" dirty="0"/>
-              <a:t>雅各睡醒了，說：「耶和華真在這裡，我竟不知道！」 </a:t>
+              <a:t>雅各睡醒了，說：「耶和華真在這裏，我竟不知道！」 </a:t>
             </a:r>
             <a:r>
               <a:rPr lang="en-US" sz="3600" dirty="0">
@@ -5293,7 +5293,7 @@
             </a:r>
             <a:r>
               <a:rPr lang="en-US" sz="3200" dirty="0"/>
-              <a:t>耶和華是我的牧者，我必不致缺乏。</a:t>
+              <a:t>耶和華是我的牧者，我必不至缺乏。</a:t>
             </a:r>
           </a:p>
           <a:p>
@@ -5329,7 +5329,7 @@
             </a:r>
             <a:r>
               <a:rPr lang="en-US" sz="3200" dirty="0"/>
-              <a:t>我雖然行過死蔭的幽谷，也不怕遭害，因為你與我同在，你的杖、你的竿都安慰我。</a:t>
+              <a:t>我雖然行過死蔭的幽谷，也不怕遭害，因為你與我同在；你的杖，你的竿，都安慰我。</a:t>
             </a:r>
           </a:p>
           <a:p>
@@ -5341,7 +5341,7 @@
             </a:r>
             <a:r>
               <a:rPr lang="en-US" sz="3200" dirty="0"/>
-              <a:t>在我敵人面前，你為我擺設筵席，你用油膏了我的頭，使我的福杯滿溢。</a:t>
+              <a:t>在我敵人面前，你為我擺設筵席；你用油膏了我的頭，使我的福杯滿溢。</a:t>
             </a:r>
           </a:p>
           <a:p>
@@ -5353,7 +5353,7 @@
             </a:r>
             <a:r>
               <a:rPr lang="en-US" sz="3200" dirty="0"/>
-              <a:t>我一生一世必有恩惠、慈愛隨著我，我且要住在耶和華的殿中，直到永遠。(詩23)</a:t>
+              <a:t>我一生一世必有恩惠慈愛隨着我；我且要住在耶和華的殿中，直到永遠。(詩23)</a:t>
             </a:r>
           </a:p>
           <a:p>
@@ -5718,7 +5718,7 @@
             </a:r>
             <a:r>
               <a:rPr lang="en-US" sz="4400" dirty="0"/>
-              <a:t>也不要驚慌， </a:t>
+              <a:t>也不要驚慌； </a:t>
             </a:r>
             <a:r>
               <a:rPr lang="en-US" sz="4400" u="sng" dirty="0">
@@ -5728,7 +5728,7 @@
             </a:r>
             <a:r>
               <a:rPr lang="en-US" sz="4400" dirty="0"/>
-              <a:t>只要心裡尊主基督為聖。(彼前 3:14-15</a:t>
+              <a:t>只要心裏尊主基督為聖。(彼前 3:14-15</a:t>
             </a:r>
             <a:r>
               <a:rPr lang="en-US" sz="4400" dirty="0" smtClean="0"/>
@@ -5885,7 +5885,7 @@
             </a:r>
             <a:r>
               <a:rPr lang="en-US" sz="4400" dirty="0"/>
-              <a:t>夜裡四更天，耶穌在海面上走，往門徒那裡去。 </a:t>
+              <a:t>夜裏四更天，耶穌在海面上走，往門徒那裏去。 </a:t>
             </a:r>
             <a:r>
               <a:rPr lang="en-US" sz="4400" u="sng" dirty="0">
@@ -6063,7 +6063,7 @@
             </a:r>
             <a:r>
               <a:rPr lang="en-US" sz="4400" dirty="0" smtClean="0"/>
-              <a:t>--- 彼得就從船上下去，在水面上走，要到耶穌那裡去。 </a:t>
+              <a:t>--- 彼得就從船上下去，在水面上走，要到耶穌那裏去； </a:t>
             </a:r>
             <a:r>
               <a:rPr lang="en-US" sz="4400" u="sng" dirty="0" smtClean="0">
@@ -6073,7 +6073,7 @@
             </a:r>
             <a:r>
               <a:rPr lang="en-US" sz="4400" dirty="0" smtClean="0"/>
-              <a:t>只因見風甚大，就害怕，將要沉下去，便喊著說：「主啊，救我！」 (太 14: 29-30)</a:t>
+              <a:t>只因見風甚大，就害怕，將要沉下去，便喊着說：「主啊，救我！」 (太 14: 29-30)</a:t>
             </a:r>
             <a:endParaRPr lang="en-US" sz="4400" dirty="0"/>
           </a:p>
@@ -6191,7 +6191,7 @@
             </a:r>
             <a:r>
               <a:rPr lang="en-US" sz="3200" dirty="0"/>
-              <a:t>也不要驚慌， </a:t>
+              <a:t>也不要驚慌； </a:t>
             </a:r>
             <a:r>
               <a:rPr lang="en-US" sz="3200" u="sng" dirty="0">
@@ -6201,7 +6201,7 @@
             </a:r>
             <a:r>
               <a:rPr lang="en-US" sz="3200" dirty="0"/>
-              <a:t>只要心裡尊主基督為聖。(彼前 3:14-15)</a:t>
+              <a:t>只要心裏尊主基督為聖。(彼前 3:14-15)</a:t>
             </a:r>
           </a:p>
           <a:p>
@@ -6239,7 +6239,7 @@
             </a:r>
             <a:r>
               <a:rPr lang="en-US" sz="3200" dirty="0"/>
-              <a:t>夜裡四更天，耶穌在海面上走，往門徒那裡去。 </a:t>
+              <a:t>夜裏四更天，耶穌在海面上走，往門徒那裏去。 </a:t>
             </a:r>
             <a:r>
               <a:rPr lang="en-US" sz="3200" u="sng" dirty="0">
@@ -6279,7 +6279,7 @@
             </a:r>
             <a:r>
               <a:rPr lang="en-US" sz="3200" dirty="0"/>
-              <a:t>就從船上下去，在水面上走，要到耶穌那裡去。 </a:t>
+              <a:t>就從船上下去，在水面上走，要到耶穌那裏去； </a:t>
             </a:r>
             <a:r>
               <a:rPr lang="en-US" sz="3200" u="sng" dirty="0">
@@ -6289,7 +6289,7 @@
             </a:r>
             <a:r>
               <a:rPr lang="en-US" sz="3200" dirty="0"/>
-              <a:t>只因見風甚大，就害怕，將要沉下去，便喊著說：「主啊，救我！」 (太 14: 29-30)</a:t>
+              <a:t>只因見風甚大，就害怕，將要沉下去，便喊着說：「主啊，救我！」 (太 14: 29-30)</a:t>
             </a:r>
           </a:p>
         </p:txBody>
@@ -6563,7 +6563,7 @@
             </a:r>
             <a:r>
               <a:rPr lang="en-US" sz="2800" dirty="0"/>
-              <a:t>耶和華是我的牧者，我必不致缺乏。</a:t>
+              <a:t>耶和華是我的牧者，我必不至缺乏。</a:t>
             </a:r>
           </a:p>
           <a:p>
@@ -6599,7 +6599,7 @@
             </a:r>
             <a:r>
               <a:rPr lang="en-US" sz="2800" dirty="0"/>
-              <a:t>我雖然行過死蔭的幽谷，也不怕遭害，因為你與我同在，你的杖、你的竿都安慰我。</a:t>
+              <a:t>我雖然行過死蔭的幽谷，也不怕遭害，因為你與我同在；你的杖，你的竿，都安慰我。</a:t>
             </a:r>
           </a:p>
           <a:p>
@@ -6611,7 +6611,7 @@
             </a:r>
             <a:r>
               <a:rPr lang="en-US" sz="2800" dirty="0"/>
-              <a:t>在我敵人面前，你為我擺設筵席，你用油膏了我的頭，使我的福杯滿溢。</a:t>
+              <a:t>在我敵人面前，你為我擺設筵席；你用油膏了我的頭，使我的福杯滿溢。</a:t>
             </a:r>
           </a:p>
           <a:p>
@@ -6623,7 +6623,7 @@
             </a:r>
             <a:r>
               <a:rPr lang="en-US" sz="2800" dirty="0"/>
-              <a:t>我一生一世必有恩惠、慈愛隨著我，我且要住在耶和華的殿中，直到永遠。(詩23)</a:t>
+              <a:t>我一生一世必有恩惠慈愛隨着我；我且要住在耶和華的殿中，直到永遠。(詩23)</a:t>
             </a:r>
           </a:p>
           <a:p>
@@ -6891,7 +6891,7 @@
             </a:r>
             <a:r>
               <a:rPr lang="en-US" sz="3200" dirty="0"/>
-              <a:t>兒女既同有血肉之體，他也照樣親自成了血肉之體，特要藉著死敗壞那掌死權的，就是魔鬼， </a:t>
+              <a:t>兒女既同有血肉之體，他也照樣親自成了血肉之體，特要藉着死敗壞那掌死權的，就是魔鬼， </a:t>
             </a:r>
             <a:r>
               <a:rPr lang="en-US" sz="3200" dirty="0">
@@ -7224,7 +7224,7 @@
             </a:r>
             <a:r>
               <a:rPr lang="en-US" sz="4400" dirty="0"/>
-              <a:t>並且那在主裡的弟兄，多半因我受的捆鎖就篤信不疑，越發放膽傳神的道，無所懼怕</a:t>
+              <a:t>並且那在主裏的弟兄多半因我受的捆鎖就篤信不疑，越發放膽傳神的道，無所懼怕</a:t>
             </a:r>
             <a:r>
               <a:rPr lang="en-US" sz="4400" dirty="0" smtClean="0"/>
@@ -7473,7 +7473,7 @@
             </a:r>
             <a:r>
               <a:rPr lang="en-US" sz="3600" dirty="0"/>
-              <a:t>敬畏耶和華是智慧的開端，認識至聖者便是聰明。 (箴 9:10)  </a:t>
+              <a:t>敬畏耶和華是智慧的開端；認識至聖者便是聰明。 (箴 9:10)  </a:t>
             </a:r>
             <a:endParaRPr lang="en-US" sz="3600" dirty="0">
               <a:hlinkClick r:id="rId3"/>
@@ -7495,7 +7495,7 @@
             </a:r>
             <a:r>
               <a:rPr lang="en-US" sz="3600" dirty="0"/>
-              <a:t>所以，我們既得了不能震動的國，就當感恩，照神所喜悅的，用虔誠、敬畏的心侍奉神， </a:t>
+              <a:t>所以，我們既得了不能震動的國，就當感恩，照神所喜悅的，用虔誠、敬畏的心事奉神， </a:t>
             </a:r>
             <a:r>
               <a:rPr lang="en-US" sz="3600" dirty="0">
